--- a/azure-assessment/sample-reports/contoso-azure-assessment.pptx
+++ b/azure-assessment/sample-reports/contoso-azure-assessment.pptx
@@ -6399,7 +6399,7 @@
                 </a:solidFill>
                 <a:latin typeface="Calibri"/>
               </a:rPr>
-              <a:t>•  106 findings were raised: 17 high, 73 medium and 16 low severity, affecting 78 resources.</a:t>
+              <a:t>•  106 finding(s) were raised: 17 high, 73 medium and 16 low severity, affecting 78 resources.</a:t>
             </a:r>
           </a:p>
           <a:p>
@@ -6649,7 +6649,7 @@
                 </a:solidFill>
                 <a:latin typeface="Calibri"/>
               </a:rPr>
-              <a:t>•  Read-only collection via Azure Resource Graph</a:t>
+              <a:t>•  Based on the inventory export supplied by Contoso</a:t>
             </a:r>
           </a:p>
           <a:p>

--- a/azure-assessment/sample-reports/contoso-azure-assessment.pptx
+++ b/azure-assessment/sample-reports/contoso-azure-assessment.pptx
@@ -7390,7 +7390,7 @@
         </p:nvGraphicFramePr>
         <p:xfrm>
           <a:off x="6400800" y="1554480"/>
-          <a:ext cx="5303518" cy="2194560"/>
+          <a:ext cx="5303516" cy="2194560"/>
         </p:xfrm>
         <a:graphic>
           <a:graphicData uri="http://schemas.openxmlformats.org/drawingml/2006/table">
@@ -7399,12 +7399,12 @@
                 <a:tableStyleId>{5C22544A-7EE6-4342-B048-85BDC9FD1C3A}</a:tableStyleId>
               </a:tblPr>
               <a:tblGrid>
-                <a:gridCol w="2204060"/>
-                <a:gridCol w="688768"/>
-                <a:gridCol w="757645"/>
-                <a:gridCol w="551015"/>
-                <a:gridCol w="551015"/>
-                <a:gridCol w="551015"/>
+                <a:gridCol w="1854377"/>
+                <a:gridCol w="778838"/>
+                <a:gridCol w="853013"/>
+                <a:gridCol w="630488"/>
+                <a:gridCol w="593400"/>
+                <a:gridCol w="593400"/>
               </a:tblGrid>
               <a:tr h="365760">
                 <a:tc>
